--- a/alia_django/apps/modeling/data/static/videos/Vaseline.pptx
+++ b/alia_django/apps/modeling/data/static/videos/Vaseline.pptx
@@ -3222,7 +3222,7 @@
               </a:defRPr>
             </a:pPr>
             <a:r>
-              <a:t>Vitalisez votre vie quotidienne avec Vaseline, le choix naturel pour un corps hydraté et doux.</a:t>
+              <a:t>Vital : le choix naturel pour un corps hydraté et en bonne santé.</a:t>
             </a:r>
           </a:p>
         </p:txBody>
@@ -3374,7 +3374,7 @@
               </a:defRPr>
             </a:pPr>
             <a:r>
-              <a:t>Le manque d'hydratation est une préoccupation majeure dans notre société actuelle. Les peaux sèches et irritées peuvent causer des problèmes de santé tels que la dermatite, les ecchymoses et l'apparence pâle. Les produits déshydratants sont souvent trop gras ou trop légers, ne répondant pas aux besoins réels des peaux.</a:t>
+              <a:t>Les patients souffrent souvent de peau sèche, irritée et déséquilibrée. La recherche d'un produit qui apporte à la fois l'hydratation et le lubrification est un défi quotidien. Les patients sont prêts à investir dans une solution qui leur permettra de retrouver la douceur et la flexibilité de leur peau.</a:t>
             </a:r>
           </a:p>
         </p:txBody>
@@ -3522,7 +3522,7 @@
               <a:defRPr sz="1800"/>
             </a:pPr>
             <a:r>
-              <a:t>La formule unique de Vaseline repose sur l'huile de cire de coco et d'olive, riches en acides gras essentiels qui hydratent et nourrissent les peaux. Cette combinaison naturelle permet de créer un film protecteur qui réduit la perte d'eau et maintient une peau douce et lissée.</a:t>
+              <a:t>Vaseline, créée par Vital, utilise des ingrédients naturels comme le cire d'abeille et l'huile de coco pour apporter une hydratation profonde à la peau. Son mode d'action unique permet de créer un film protecteur qui réduit l'inflammation et améliore la barrière cutanée, ce qui en fait l'option idéale pour les patients souffrant de peau sèche ou irritée.</a:t>
             </a:r>
           </a:p>
         </p:txBody>
@@ -3694,19 +3694,19 @@
               <a:defRPr sz="1800"/>
             </a:pPr>
             <a:r>
-              <a:t>1. Hydratation naturelle : Vaseline repose sur les huiles naturelles pour hydrater les peaux.</a:t>
+              <a:t>- Hydratation naturelle : Vaseline utilise des ingrédients naturels pour apporter une hydratation profonde à la peau.</a:t>
             </a:r>
             <a:br/>
             <a:r>
-              <a:t>2. Protection contre les irritations : La formule unique de Vaseline protège les peaux contre les irritants et les allergènes.</a:t>
+              <a:t>- Lubrification durable : Le produit crée un film protecteur qui réduit l'inflammation et améliore la barrière cutanée.</a:t>
             </a:r>
             <a:br/>
             <a:r>
-              <a:t>3. Douceur et lubrification : Vaseline est parfaite pour les personnes ayant des peaux sèches, grasses ou sensibles.</a:t>
+              <a:t>- Sécurité garantie : Vaseline est conçu sans parfum, sans colorant et sans allergène pour assurer une expérience de peau saine.</a:t>
             </a:r>
             <a:br/>
             <a:r>
-              <a:t>4. Sécurité sans compromis : Pas d'ingrédients artificiels ni de parabènes dans la formule.</a:t>
+              <a:t>- Résistance à l'eau : Le produit repose sur un système de lubrification unique qui permet à la peau de rester hydratée même après avoir été soumise à des activités physiques intenses.</a:t>
             </a:r>
           </a:p>
         </p:txBody>
@@ -3854,7 +3854,7 @@
               <a:defRPr sz="2000"/>
             </a:pPr>
             <a:r>
-              <a:t>La fabrication de Vaseline est menée avec une excellence technique qui garantit une qualité exceptionnelle. La forme crème permet un excellent mélange et une absorption rapide, ce qui rend Vaseline idéale pour les peaux sèches ou irritées.</a:t>
+              <a:t>Vaseline est fabriquée avec une excellence de fabrication exceptionnelle, utilisant des ingrédients naturels de haute qualité. La forme Crème permet un excellent absorbement et une distribution uniforme sur la peau, offrant ainsi une expérience de peau saine et hydratée.</a:t>
             </a:r>
           </a:p>
         </p:txBody>
@@ -4208,7 +4208,7 @@
               </a:defRPr>
             </a:pPr>
             <a:r>
-              <a:t>Découvrez la force de Vital en choisissant Vaseline comme votre partenaire de beauté quotidienne. Expérimentez son hydratant et son lubrifiant naturel pour un corps doux et lissé.</a:t>
+              <a:t>Rejoignez le mouvement Vital et découvrez l'avantage de Vaseline pour votre peau. Investissez dans votre bien-être et vos soins de peau avec notre produit naturellement hydratant et lubrifiant.</a:t>
             </a:r>
           </a:p>
         </p:txBody>

--- a/alia_django/apps/modeling/data/static/videos/Vaseline.pptx
+++ b/alia_django/apps/modeling/data/static/videos/Vaseline.pptx
@@ -3222,7 +3222,7 @@
               </a:defRPr>
             </a:pPr>
             <a:r>
-              <a:t>Vitalisez votre vie avec Vaseline, le hydratant et lubrifiant par excellence.</a:t>
+              <a:t>Développez la confiance en votre peau avec Vaseline, la crème parfaite pour un hygiène et une beauté optimale.</a:t>
             </a:r>
           </a:p>
         </p:txBody>
@@ -3374,7 +3374,7 @@
               </a:defRPr>
             </a:pPr>
             <a:r>
-              <a:t>Le manque d'hydratation et de protection peut entraîner des problèmes de peau tels que la sécheresse, les irritations et l'apparence saine. Les patients souffrent également de difficultés pour trouver un produit qui répond à leurs besoins spécifiques.</a:t>
+              <a:t>Les patients souffrent souvent d'efflorescences cutanées, de sécheresse et d'inconfort liés à des conditions climatiques extrêmes ou à une peau sensible. Ils cherchent un produit qui puisse les aider à retrouver leur hygiène et leur beauté naturelles.</a:t>
             </a:r>
           </a:p>
         </p:txBody>
@@ -3522,7 +3522,7 @@
               <a:defRPr sz="1800"/>
             </a:pPr>
             <a:r>
-              <a:t>Vaseline propose une solution unique en combinant des ingrédients naturels et scientifiquement étudiés pour fournir une hydratation profonde et une protection parfaite. Notre formule est conçue pour répondre aux besoins de tous les types de peau, sans compromis.</a:t>
+              <a:t>Vaseline utilise un mélange de beurre de karité et de cire d'abeille pour hydrater la peau, tandis que son lubrifiant unique permet une glissade silencieuse sur les doigts. Cette combinaison de propriétés naturelles et scientifiques garantit un résultat durable et sans irritation.</a:t>
             </a:r>
           </a:p>
         </p:txBody>
@@ -3694,19 +3694,19 @@
               <a:defRPr sz="1800"/>
             </a:pPr>
             <a:r>
-              <a:t>1. Qualité des ingrédients : Utilisons des ingrédients naturels et scientifiquement étudiés.</a:t>
+              <a:t>1. Hydratation optimale : Vaseline protège la peau contre la sécheresse et l'efflorescence.</a:t>
             </a:r>
             <a:br/>
             <a:r>
-              <a:t>2. Formule adaptée : Conçue pour répondre aux besoins de tous les types de peau.</a:t>
+              <a:t>2. Lubrification efficace : Le produit permet une glissade silencieuse sur les doigts, sans irritation ni brûlure.</a:t>
             </a:r>
             <a:br/>
             <a:r>
-              <a:t>3. Efficacité garantie : Résultats tangibles après l'utilisation.</a:t>
+              <a:t>3. Ingrédients naturels : Vaseline utilise des ingrédients naturels pour hydrater et nourrir la peau.</a:t>
             </a:r>
             <a:br/>
             <a:r>
-              <a:t>4. Sécurité sans compromis : Protégées par des tests rigoureux et une supervision médicale.</a:t>
+              <a:t>4. Durabilité garantie : Le produit maintient son efficacité tout au long de la journée.</a:t>
             </a:r>
           </a:p>
         </p:txBody>
@@ -3854,7 +3854,7 @@
               <a:defRPr sz="2000"/>
             </a:pPr>
             <a:r>
-              <a:t>Notre crème est fabriquée à partir de la meilleure qualité, avec un mélange unique de huiles et graisses naturelles. Notre forme Crème permet une absorption parfaite et une utilisation facile.</a:t>
+              <a:t>Vaseline est fabriquée avec une excellence de fabrication qui garantit sa qualité et sa durabilité. Sa forme crème permet une application facile et confortable sur la peau, sans creux ni bulles.</a:t>
             </a:r>
           </a:p>
         </p:txBody>
@@ -4208,7 +4208,7 @@
               </a:defRPr>
             </a:pPr>
             <a:r>
-              <a:t>Rejoignez le mouvement Vitalisant ! Découvrez la différence de Vaseline et vivez une vie plus hydratée, plus protégée.</a:t>
+              <a:t>Développez votre confiance en votre peau avec Vaseline. Découvrez l'efficacité de notre produit pour une hygiène et une beauté optimale.</a:t>
             </a:r>
           </a:p>
         </p:txBody>
